--- a/Preckon-system/deliverables/Preckon-Enterprise-Briefing-v2.pptx
+++ b/Preckon-system/deliverables/Preckon-Enterprise-Briefing-v2.pptx
@@ -19869,7 +19869,7 @@
         <p:spPr>
           <a:xfrm>
             <a:off x="658368" y="3154680"/>
-            <a:ext cx="2622727" cy="1783080"/>
+            <a:ext cx="2622727" cy="1572768"/>
           </a:xfrm>
           <a:prstGeom prst="roundRect">
             <a:avLst>
@@ -19917,7 +19917,7 @@
         <p:spPr>
           <a:xfrm>
             <a:off x="813816" y="3291840"/>
-            <a:ext cx="2311831" cy="1508760"/>
+            <a:ext cx="2311831" cy="1298448"/>
           </a:xfrm>
           <a:prstGeom prst="rect">
             <a:avLst/>
@@ -20000,7 +20000,7 @@
         <p:spPr>
           <a:xfrm>
             <a:off x="3409111" y="3154680"/>
-            <a:ext cx="2622727" cy="1783080"/>
+            <a:ext cx="2622727" cy="1572768"/>
           </a:xfrm>
           <a:prstGeom prst="roundRect">
             <a:avLst>
@@ -20048,7 +20048,7 @@
         <p:spPr>
           <a:xfrm>
             <a:off x="3564559" y="3291840"/>
-            <a:ext cx="2311831" cy="1508760"/>
+            <a:ext cx="2311831" cy="1298448"/>
           </a:xfrm>
           <a:prstGeom prst="rect">
             <a:avLst/>
@@ -20131,7 +20131,7 @@
         <p:spPr>
           <a:xfrm>
             <a:off x="6159855" y="3154680"/>
-            <a:ext cx="2622727" cy="1783080"/>
+            <a:ext cx="2622727" cy="1572768"/>
           </a:xfrm>
           <a:prstGeom prst="roundRect">
             <a:avLst>
@@ -20179,7 +20179,7 @@
         <p:spPr>
           <a:xfrm>
             <a:off x="6315303" y="3291840"/>
-            <a:ext cx="2311831" cy="1508760"/>
+            <a:ext cx="2311831" cy="1298448"/>
           </a:xfrm>
           <a:prstGeom prst="rect">
             <a:avLst/>
@@ -20262,7 +20262,7 @@
         <p:spPr>
           <a:xfrm>
             <a:off x="8910599" y="3154680"/>
-            <a:ext cx="2622727" cy="1783080"/>
+            <a:ext cx="2622727" cy="1572768"/>
           </a:xfrm>
           <a:prstGeom prst="roundRect">
             <a:avLst>
@@ -20310,7 +20310,7 @@
         <p:spPr>
           <a:xfrm>
             <a:off x="9066047" y="3291840"/>
-            <a:ext cx="2311831" cy="1508760"/>
+            <a:ext cx="2311831" cy="1298448"/>
           </a:xfrm>
           <a:prstGeom prst="rect">
             <a:avLst/>
@@ -20940,7 +20940,7 @@
         </p:nvSpPr>
         <p:spPr>
           <a:xfrm>
-            <a:off x="658368" y="1513332"/>
+            <a:off x="658368" y="1696212"/>
             <a:ext cx="9601200" cy="1463040"/>
           </a:xfrm>
           <a:prstGeom prst="rect">
@@ -20985,8 +20985,8 @@
         </p:nvSpPr>
         <p:spPr>
           <a:xfrm>
-            <a:off x="658368" y="2290571"/>
-            <a:ext cx="2622727" cy="2331720"/>
+            <a:off x="658368" y="2473451"/>
+            <a:ext cx="2622727" cy="1965960"/>
           </a:xfrm>
           <a:prstGeom prst="roundRect">
             <a:avLst>
@@ -21033,8 +21033,8 @@
         </p:nvSpPr>
         <p:spPr>
           <a:xfrm>
-            <a:off x="813816" y="2427731"/>
-            <a:ext cx="2311831" cy="2057400"/>
+            <a:off x="813816" y="2610611"/>
+            <a:ext cx="2311831" cy="1691639"/>
           </a:xfrm>
           <a:prstGeom prst="rect">
             <a:avLst/>
@@ -21116,8 +21116,8 @@
         </p:nvSpPr>
         <p:spPr>
           <a:xfrm>
-            <a:off x="3409111" y="2290571"/>
-            <a:ext cx="2622727" cy="2331720"/>
+            <a:off x="3409111" y="2473451"/>
+            <a:ext cx="2622727" cy="1965960"/>
           </a:xfrm>
           <a:prstGeom prst="roundRect">
             <a:avLst>
@@ -21164,8 +21164,8 @@
         </p:nvSpPr>
         <p:spPr>
           <a:xfrm>
-            <a:off x="3564559" y="2427731"/>
-            <a:ext cx="2311831" cy="2057400"/>
+            <a:off x="3564559" y="2610611"/>
+            <a:ext cx="2311831" cy="1691639"/>
           </a:xfrm>
           <a:prstGeom prst="rect">
             <a:avLst/>
@@ -21247,8 +21247,8 @@
         </p:nvSpPr>
         <p:spPr>
           <a:xfrm>
-            <a:off x="6159855" y="2290571"/>
-            <a:ext cx="2622727" cy="2331720"/>
+            <a:off x="6159855" y="2473451"/>
+            <a:ext cx="2622727" cy="1965960"/>
           </a:xfrm>
           <a:prstGeom prst="roundRect">
             <a:avLst>
@@ -21295,8 +21295,8 @@
         </p:nvSpPr>
         <p:spPr>
           <a:xfrm>
-            <a:off x="6315303" y="2427731"/>
-            <a:ext cx="2311831" cy="2057400"/>
+            <a:off x="6315303" y="2610611"/>
+            <a:ext cx="2311831" cy="1691639"/>
           </a:xfrm>
           <a:prstGeom prst="rect">
             <a:avLst/>
@@ -21378,8 +21378,8 @@
         </p:nvSpPr>
         <p:spPr>
           <a:xfrm>
-            <a:off x="8910599" y="2290571"/>
-            <a:ext cx="2622727" cy="2331720"/>
+            <a:off x="8910599" y="2473451"/>
+            <a:ext cx="2622727" cy="1965960"/>
           </a:xfrm>
           <a:prstGeom prst="roundRect">
             <a:avLst>
@@ -21426,8 +21426,8 @@
         </p:nvSpPr>
         <p:spPr>
           <a:xfrm>
-            <a:off x="9066047" y="2427731"/>
-            <a:ext cx="2311831" cy="2057400"/>
+            <a:off x="9066047" y="2610611"/>
+            <a:ext cx="2311831" cy="1691639"/>
           </a:xfrm>
           <a:prstGeom prst="rect">
             <a:avLst/>
@@ -21509,7 +21509,7 @@
         </p:nvSpPr>
         <p:spPr>
           <a:xfrm>
-            <a:off x="658368" y="4942332"/>
+            <a:off x="658368" y="4759452"/>
             <a:ext cx="10607040" cy="914400"/>
           </a:xfrm>
           <a:prstGeom prst="rect">
@@ -24534,7 +24534,7 @@
         </p:nvSpPr>
         <p:spPr>
           <a:xfrm>
-            <a:off x="658368" y="1421892"/>
+            <a:off x="658368" y="1581912"/>
             <a:ext cx="9144000" cy="1463040"/>
           </a:xfrm>
           <a:prstGeom prst="rect">
@@ -24579,8 +24579,8 @@
         </p:nvSpPr>
         <p:spPr>
           <a:xfrm>
-            <a:off x="658368" y="2199131"/>
-            <a:ext cx="2622727" cy="2514600"/>
+            <a:off x="658368" y="2359151"/>
+            <a:ext cx="2622727" cy="2194560"/>
           </a:xfrm>
           <a:prstGeom prst="roundRect">
             <a:avLst>
@@ -24627,8 +24627,8 @@
         </p:nvSpPr>
         <p:spPr>
           <a:xfrm>
-            <a:off x="813816" y="2336291"/>
-            <a:ext cx="2311831" cy="2240280"/>
+            <a:off x="813816" y="2496311"/>
+            <a:ext cx="2311831" cy="1920240"/>
           </a:xfrm>
           <a:prstGeom prst="rect">
             <a:avLst/>
@@ -24710,8 +24710,8 @@
         </p:nvSpPr>
         <p:spPr>
           <a:xfrm>
-            <a:off x="3409111" y="2199131"/>
-            <a:ext cx="2622727" cy="2514600"/>
+            <a:off x="3409111" y="2359151"/>
+            <a:ext cx="2622727" cy="2194560"/>
           </a:xfrm>
           <a:prstGeom prst="roundRect">
             <a:avLst>
@@ -24758,8 +24758,8 @@
         </p:nvSpPr>
         <p:spPr>
           <a:xfrm>
-            <a:off x="3564559" y="2336291"/>
-            <a:ext cx="2311831" cy="2240280"/>
+            <a:off x="3564559" y="2496311"/>
+            <a:ext cx="2311831" cy="1920240"/>
           </a:xfrm>
           <a:prstGeom prst="rect">
             <a:avLst/>
@@ -24841,8 +24841,8 @@
         </p:nvSpPr>
         <p:spPr>
           <a:xfrm>
-            <a:off x="6159855" y="2199131"/>
-            <a:ext cx="2622727" cy="2514600"/>
+            <a:off x="6159855" y="2359151"/>
+            <a:ext cx="2622727" cy="2194560"/>
           </a:xfrm>
           <a:prstGeom prst="roundRect">
             <a:avLst>
@@ -24889,8 +24889,8 @@
         </p:nvSpPr>
         <p:spPr>
           <a:xfrm>
-            <a:off x="6315303" y="2336291"/>
-            <a:ext cx="2311831" cy="2240280"/>
+            <a:off x="6315303" y="2496311"/>
+            <a:ext cx="2311831" cy="1920240"/>
           </a:xfrm>
           <a:prstGeom prst="rect">
             <a:avLst/>
@@ -24972,8 +24972,8 @@
         </p:nvSpPr>
         <p:spPr>
           <a:xfrm>
-            <a:off x="8910599" y="2199131"/>
-            <a:ext cx="2622727" cy="2514600"/>
+            <a:off x="8910599" y="2359151"/>
+            <a:ext cx="2622727" cy="2194560"/>
           </a:xfrm>
           <a:prstGeom prst="roundRect">
             <a:avLst>
@@ -25020,8 +25020,8 @@
         </p:nvSpPr>
         <p:spPr>
           <a:xfrm>
-            <a:off x="9066047" y="2336291"/>
-            <a:ext cx="2311831" cy="2240280"/>
+            <a:off x="9066047" y="2496311"/>
+            <a:ext cx="2311831" cy="1920240"/>
           </a:xfrm>
           <a:prstGeom prst="rect">
             <a:avLst/>
@@ -25103,7 +25103,7 @@
         </p:nvSpPr>
         <p:spPr>
           <a:xfrm>
-            <a:off x="658368" y="5033772"/>
+            <a:off x="658368" y="4873752"/>
             <a:ext cx="22860" cy="566928"/>
           </a:xfrm>
           <a:prstGeom prst="rect">
@@ -25147,7 +25147,7 @@
         </p:nvSpPr>
         <p:spPr>
           <a:xfrm>
-            <a:off x="804672" y="5033772"/>
+            <a:off x="804672" y="4873752"/>
             <a:ext cx="9912096" cy="914400"/>
           </a:xfrm>
           <a:prstGeom prst="rect">
